--- a/assets/pptx/catalog-791.pptx
+++ b/assets/pptx/catalog-791.pptx
@@ -3253,7 +3253,7 @@
                 <a:ea typeface="Ebrima"/>
                 <a:cs typeface="Ebrima"/>
               </a:rPr>
-              <a:t>ሥምህን አከብራለሁ ንገሥ እልሃለሁ (2x)</a:t>
+              <a:t>ሥምህን አከብራለሁ ንገሥ እልሃለሁ 2x</a:t>
             </a:r>
           </a:p>
         </p:txBody>
@@ -3655,7 +3655,7 @@
                 <a:ea typeface="Ebrima"/>
                 <a:cs typeface="Ebrima"/>
               </a:rPr>
-              <a:t>የእኔ ጌታ በአንተ ታለፈ (2x)</a:t>
+              <a:t>የእኔ ጌታ በአንተ ታለፈ 2x</a:t>
             </a:r>
           </a:p>
         </p:txBody>
